--- a/entregas/posts/site/kit/editavel/efeito-rebote-sex-09-10-opcao-b.pptx
+++ b/entregas/posts/site/kit/editavel/efeito-rebote-sex-09-10-opcao-b.pptx
@@ -6647,7 +6647,7 @@
         <p:spPr>
           <a:xfrm>
             <a:off x="915442" y="3567811"/>
-            <a:ext cx="8559864" cy="1867049"/>
+            <a:ext cx="6652959" cy="1867049"/>
           </a:xfrm>
           <a:prstGeom prst="rect">
             <a:avLst/>
@@ -6680,7 +6680,7 @@
                 <a:ea typeface="Barlow Condensed"/>
                 <a:cs typeface="Barlow Condensed"/>
               </a:rPr>
-              <a:t>Um tema com fonte,</a:t>
+              <a:t>Um tema com</a:t>
             </a:r>
             <a:br/>
             <a:r>
@@ -6692,7 +6692,7 @@
                 <a:ea typeface="Barlow Condensed"/>
                 <a:cs typeface="Barlow Condensed"/>
               </a:rPr>
-              <a:t>três vezes por semana.</a:t>
+              <a:t>fonte a cada post.</a:t>
             </a:r>
           </a:p>
         </p:txBody>
